--- a/DAVICA2.pptx
+++ b/DAVICA2.pptx
@@ -3515,8 +3515,8 @@
         </p:nvSpPr>
         <p:spPr>
           <a:xfrm>
-            <a:off x="374904" y="768096"/>
-            <a:ext cx="11548872" cy="5907024"/>
+            <a:off x="374904" y="1200727"/>
+            <a:ext cx="11548872" cy="5486399"/>
           </a:xfrm>
         </p:spPr>
         <p:txBody>
@@ -3537,11 +3537,34 @@
             <a:pPr marL="0" indent="0">
               <a:buNone/>
             </a:pPr>
+            <a:endParaRPr lang="en-SG" dirty="0"/>
+          </a:p>
+          <a:p>
+            <a:pPr marL="0" indent="0">
+              <a:buNone/>
+            </a:pPr>
+            <a:r>
+              <a:rPr lang="en-SG" dirty="0"/>
+              <a:t>Key points (subproblems)</a:t>
+            </a:r>
+          </a:p>
+          <a:p>
+            <a:pPr marL="0" indent="0">
+              <a:buNone/>
+            </a:pPr>
             <a:r>
               <a:rPr lang="en-SG" dirty="0"/>
               <a:t>1. </a:t>
             </a:r>
             <a:r>
+              <a:rPr lang="en-SG" b="1" dirty="0"/>
+              <a:t>Profitability by client segment</a:t>
+            </a:r>
+            <a:r>
+              <a:rPr lang="en-SG" dirty="0"/>
+              <a:t>: </a:t>
+            </a:r>
+            <a:r>
               <a:rPr lang="en-SG" dirty="0" err="1"/>
               <a:t>Analyze</a:t>
             </a:r>
@@ -3559,6 +3582,14 @@
               <a:t>2. </a:t>
             </a:r>
             <a:r>
+              <a:rPr lang="en-SG" b="1" dirty="0"/>
+              <a:t>Satisfaction by client segment</a:t>
+            </a:r>
+            <a:r>
+              <a:rPr lang="en-SG" dirty="0"/>
+              <a:t>: </a:t>
+            </a:r>
+            <a:r>
               <a:rPr lang="en-SG" dirty="0" err="1"/>
               <a:t>Analyze</a:t>
             </a:r>
@@ -3566,25 +3597,6 @@
               <a:rPr lang="en-SG" dirty="0"/>
               <a:t> survey ratings for: Presales &amp; Partnership, Technical Expertise, Project Delivery, Post-Sales Support, NPS and to identify segments with consistently high or low satisfaction.</a:t>
             </a:r>
-          </a:p>
-          <a:p>
-            <a:pPr marL="0" indent="0">
-              <a:buNone/>
-            </a:pPr>
-            <a:r>
-              <a:rPr lang="en-SG" dirty="0"/>
-              <a:t>3. Compare profitability metrics against: Survey scores, NPS to see whether profitable clients are also satisfied clients, and identify segments that are either high-risk or high-potential.</a:t>
-            </a:r>
-          </a:p>
-          <a:p>
-            <a:endParaRPr lang="en-SG" dirty="0"/>
-          </a:p>
-          <a:p>
-            <a:endParaRPr lang="en-SG" dirty="0"/>
-          </a:p>
-          <a:p>
-            <a:pPr lvl="1"/>
-            <a:endParaRPr lang="en-SG" dirty="0"/>
           </a:p>
         </p:txBody>
       </p:sp>
@@ -3636,7 +3648,7 @@
         </p:nvSpPr>
         <p:spPr>
           <a:xfrm>
-            <a:off x="394855" y="112135"/>
+            <a:off x="394855" y="-152546"/>
             <a:ext cx="10515600" cy="1325563"/>
           </a:xfrm>
         </p:spPr>
@@ -3678,12 +3690,14 @@
         </p:nvSpPr>
         <p:spPr>
           <a:xfrm>
-            <a:off x="394855" y="1437698"/>
-            <a:ext cx="11402290" cy="5120120"/>
+            <a:off x="394855" y="951344"/>
+            <a:ext cx="11402290" cy="5572847"/>
           </a:xfrm>
         </p:spPr>
         <p:txBody>
-          <a:bodyPr/>
+          <a:bodyPr>
+            <a:normAutofit/>
+          </a:bodyPr>
           <a:lstStyle/>
           <a:p>
             <a:pPr marL="0" indent="0">
@@ -3691,49 +3705,94 @@
             </a:pPr>
             <a:r>
               <a:rPr lang="en-SG" dirty="0"/>
-              <a:t>4. Investigate hardware costs, software costs, manpower costs and low-scoring service dimensions to identify the underlying drivers of poor performance.</a:t>
-            </a:r>
-          </a:p>
-          <a:p>
+              <a:t>3. </a:t>
+            </a:r>
+            <a:r>
+              <a:rPr lang="en-SG" b="1" dirty="0"/>
+              <a:t>Satisfaction–profitability relationship</a:t>
+            </a:r>
             <a:r>
               <a:rPr lang="en-SG" dirty="0"/>
-              <a:t>TLDR: Each key point addresses a unique question:</a:t>
-            </a:r>
-          </a:p>
-          <a:p>
+              <a:t>: </a:t>
+            </a:r>
+            <a:r>
+              <a:rPr lang="en-SG" dirty="0" err="1"/>
+              <a:t>Analyze</a:t>
+            </a:r>
+            <a:r>
+              <a:rPr lang="en-SG" dirty="0"/>
+              <a:t> Satisfaction vs Gross Profit, NPS vs Gross Margin, Satisfaction vs Revenue to check whether improving customer satisfaction translates into stronger business performance.</a:t>
+            </a:r>
+          </a:p>
+          <a:p>
+            <a:pPr marL="0" indent="0">
+              <a:buNone/>
+            </a:pPr>
+            <a:r>
+              <a:rPr lang="en-SG" dirty="0"/>
+              <a:t>4. </a:t>
+            </a:r>
             <a:r>
               <a:rPr lang="en-SG" b="1" dirty="0"/>
-              <a:t>1. Who makes money?</a:t>
+              <a:t>Drivers of profitability</a:t>
             </a:r>
             <a:r>
               <a:rPr lang="en-SG" dirty="0"/>
-              <a:t> </a:t>
-            </a:r>
-          </a:p>
-          <a:p>
+              <a:t>: Investigate hardware costs, software costs, manpower costs and low-scoring service dimensions highlighting opportunities for cost optimization and margin improvement.</a:t>
+            </a:r>
+          </a:p>
+          <a:p>
+            <a:pPr marL="0" indent="0">
+              <a:buNone/>
+            </a:pPr>
+            <a:r>
+              <a:rPr lang="en-SG" dirty="0"/>
+              <a:t>5. </a:t>
+            </a:r>
             <a:r>
               <a:rPr lang="en-SG" b="1" dirty="0"/>
-              <a:t>2. Who is satisfied?</a:t>
+              <a:t>Drivers of satisfaction: </a:t>
             </a:r>
             <a:r>
               <a:rPr lang="en-SG" dirty="0"/>
-              <a:t> </a:t>
-            </a:r>
-          </a:p>
-          <a:p>
+              <a:t>Analyse Presales &amp; Partnership, Technical Expertise, Project Delivery, Post-Sales Support to identify where service improvements will have the greatest effect on satisfaction and loyalty.</a:t>
+            </a:r>
+          </a:p>
+          <a:p>
+            <a:pPr marL="0" indent="0">
+              <a:buNone/>
+            </a:pPr>
+            <a:r>
+              <a:rPr lang="en-SG" dirty="0"/>
+              <a:t>6. </a:t>
+            </a:r>
             <a:r>
               <a:rPr lang="en-SG" b="1" dirty="0"/>
-              <a:t>3. Are those two groups the same?</a:t>
+              <a:t>Strategic client prioritization: </a:t>
             </a:r>
             <a:r>
               <a:rPr lang="en-SG" dirty="0"/>
-              <a:t> </a:t>
-            </a:r>
-          </a:p>
-          <a:p>
-            <a:r>
-              <a:rPr lang="en-SG" b="1" dirty="0"/>
-              <a:t>4. Why are some groups performing poorly?</a:t>
+              <a:t>Analyse profit ranges and satisfaction ranges (e.g. high </a:t>
+            </a:r>
+            <a:r>
+              <a:rPr lang="en-SG" dirty="0" err="1"/>
+              <a:t>profit+low</a:t>
+            </a:r>
+            <a:r>
+              <a:rPr lang="en-SG" dirty="0"/>
+              <a:t> satisfaction, low </a:t>
+            </a:r>
+            <a:r>
+              <a:rPr lang="en-SG" dirty="0" err="1"/>
+              <a:t>profit+low</a:t>
+            </a:r>
+            <a:r>
+              <a:rPr lang="en-SG" dirty="0"/>
+              <a:t> satisfaction etc) at a variety of combinations to </a:t>
+            </a:r>
+            <a:r>
+              <a:rPr lang="en-US" dirty="0"/>
+              <a:t>find the best opportunities and greatest risks.</a:t>
             </a:r>
             <a:endParaRPr lang="en-SG" dirty="0"/>
           </a:p>

--- a/DAVICA2.pptx
+++ b/DAVICA2.pptx
@@ -106,6 +106,11 @@
       </a:defRPr>
     </a:lvl9pPr>
   </p:defaultTextStyle>
+  <p:extLst>
+    <p:ext uri="{EFAFB233-063F-42B5-8137-9DF3F51BA10A}">
+      <p15:sldGuideLst xmlns:p15="http://schemas.microsoft.com/office/powerpoint/2012/main"/>
+    </p:ext>
+  </p:extLst>
 </p:presentation>
 </file>
 
@@ -258,7 +263,7 @@
           <a:p>
             <a:fld id="{69EE9D0A-4350-498E-80B9-A62E3FC46891}" type="datetimeFigureOut">
               <a:rPr lang="en-SG" smtClean="0"/>
-              <a:t>6/7/2026</a:t>
+              <a:t>9/7/2026</a:t>
             </a:fld>
             <a:endParaRPr lang="en-SG"/>
           </a:p>
@@ -458,7 +463,7 @@
           <a:p>
             <a:fld id="{69EE9D0A-4350-498E-80B9-A62E3FC46891}" type="datetimeFigureOut">
               <a:rPr lang="en-SG" smtClean="0"/>
-              <a:t>6/7/2026</a:t>
+              <a:t>9/7/2026</a:t>
             </a:fld>
             <a:endParaRPr lang="en-SG"/>
           </a:p>
@@ -668,7 +673,7 @@
           <a:p>
             <a:fld id="{69EE9D0A-4350-498E-80B9-A62E3FC46891}" type="datetimeFigureOut">
               <a:rPr lang="en-SG" smtClean="0"/>
-              <a:t>6/7/2026</a:t>
+              <a:t>9/7/2026</a:t>
             </a:fld>
             <a:endParaRPr lang="en-SG"/>
           </a:p>
@@ -868,7 +873,7 @@
           <a:p>
             <a:fld id="{69EE9D0A-4350-498E-80B9-A62E3FC46891}" type="datetimeFigureOut">
               <a:rPr lang="en-SG" smtClean="0"/>
-              <a:t>6/7/2026</a:t>
+              <a:t>9/7/2026</a:t>
             </a:fld>
             <a:endParaRPr lang="en-SG"/>
           </a:p>
@@ -1144,7 +1149,7 @@
           <a:p>
             <a:fld id="{69EE9D0A-4350-498E-80B9-A62E3FC46891}" type="datetimeFigureOut">
               <a:rPr lang="en-SG" smtClean="0"/>
-              <a:t>6/7/2026</a:t>
+              <a:t>9/7/2026</a:t>
             </a:fld>
             <a:endParaRPr lang="en-SG"/>
           </a:p>
@@ -1412,7 +1417,7 @@
           <a:p>
             <a:fld id="{69EE9D0A-4350-498E-80B9-A62E3FC46891}" type="datetimeFigureOut">
               <a:rPr lang="en-SG" smtClean="0"/>
-              <a:t>6/7/2026</a:t>
+              <a:t>9/7/2026</a:t>
             </a:fld>
             <a:endParaRPr lang="en-SG"/>
           </a:p>
@@ -1827,7 +1832,7 @@
           <a:p>
             <a:fld id="{69EE9D0A-4350-498E-80B9-A62E3FC46891}" type="datetimeFigureOut">
               <a:rPr lang="en-SG" smtClean="0"/>
-              <a:t>6/7/2026</a:t>
+              <a:t>9/7/2026</a:t>
             </a:fld>
             <a:endParaRPr lang="en-SG"/>
           </a:p>
@@ -1969,7 +1974,7 @@
           <a:p>
             <a:fld id="{69EE9D0A-4350-498E-80B9-A62E3FC46891}" type="datetimeFigureOut">
               <a:rPr lang="en-SG" smtClean="0"/>
-              <a:t>6/7/2026</a:t>
+              <a:t>9/7/2026</a:t>
             </a:fld>
             <a:endParaRPr lang="en-SG"/>
           </a:p>
@@ -2082,7 +2087,7 @@
           <a:p>
             <a:fld id="{69EE9D0A-4350-498E-80B9-A62E3FC46891}" type="datetimeFigureOut">
               <a:rPr lang="en-SG" smtClean="0"/>
-              <a:t>6/7/2026</a:t>
+              <a:t>9/7/2026</a:t>
             </a:fld>
             <a:endParaRPr lang="en-SG"/>
           </a:p>
@@ -2395,7 +2400,7 @@
           <a:p>
             <a:fld id="{69EE9D0A-4350-498E-80B9-A62E3FC46891}" type="datetimeFigureOut">
               <a:rPr lang="en-SG" smtClean="0"/>
-              <a:t>6/7/2026</a:t>
+              <a:t>9/7/2026</a:t>
             </a:fld>
             <a:endParaRPr lang="en-SG"/>
           </a:p>
@@ -2684,7 +2689,7 @@
           <a:p>
             <a:fld id="{69EE9D0A-4350-498E-80B9-A62E3FC46891}" type="datetimeFigureOut">
               <a:rPr lang="en-SG" smtClean="0"/>
-              <a:t>6/7/2026</a:t>
+              <a:t>9/7/2026</a:t>
             </a:fld>
             <a:endParaRPr lang="en-SG"/>
           </a:p>
@@ -2927,7 +2932,7 @@
           <a:p>
             <a:fld id="{69EE9D0A-4350-498E-80B9-A62E3FC46891}" type="datetimeFigureOut">
               <a:rPr lang="en-SG" smtClean="0"/>
-              <a:t>6/7/2026</a:t>
+              <a:t>9/7/2026</a:t>
             </a:fld>
             <a:endParaRPr lang="en-SG"/>
           </a:p>
@@ -3416,12 +3421,8 @@
           </a:p>
           <a:p>
             <a:r>
-              <a:rPr lang="en-US" dirty="0" err="1"/>
-              <a:t>pXXXXXXX</a:t>
-            </a:r>
-            <a:r>
               <a:rPr lang="en-US" dirty="0"/>
-              <a:t> </a:t>
+              <a:t>P2518031 Phan Jun Hao	</a:t>
             </a:r>
           </a:p>
           <a:p>
@@ -3521,7 +3522,7 @@
         </p:spPr>
         <p:txBody>
           <a:bodyPr>
-            <a:normAutofit/>
+            <a:normAutofit lnSpcReduction="10000"/>
           </a:bodyPr>
           <a:lstStyle/>
           <a:p>
@@ -3549,13 +3550,9 @@
             </a:r>
           </a:p>
           <a:p>
-            <a:pPr marL="0" indent="0">
-              <a:buNone/>
+            <a:pPr marL="514350" indent="-514350">
+              <a:buAutoNum type="arabicPeriod"/>
             </a:pPr>
-            <a:r>
-              <a:rPr lang="en-SG" dirty="0"/>
-              <a:t>1. </a:t>
-            </a:r>
             <a:r>
               <a:rPr lang="en-SG" b="1" dirty="0"/>
               <a:t>Profitability by client segment</a:t>
@@ -3574,28 +3571,17 @@
             </a:r>
           </a:p>
           <a:p>
-            <a:pPr marL="0" indent="0">
-              <a:buNone/>
+            <a:pPr marL="514350" indent="-514350">
+              <a:buFont typeface="Arial" panose="020B0604020202020204" pitchFamily="34" charset="0"/>
+              <a:buAutoNum type="arabicPeriod"/>
             </a:pPr>
             <a:r>
+              <a:rPr lang="en-SG" b="1" dirty="0"/>
+              <a:t>Drivers of profitability</a:t>
+            </a:r>
+            <a:r>
               <a:rPr lang="en-SG" dirty="0"/>
-              <a:t>2. </a:t>
-            </a:r>
-            <a:r>
-              <a:rPr lang="en-SG" b="1" dirty="0"/>
-              <a:t>Satisfaction by client segment</a:t>
-            </a:r>
-            <a:r>
-              <a:rPr lang="en-SG" dirty="0"/>
-              <a:t>: </a:t>
-            </a:r>
-            <a:r>
-              <a:rPr lang="en-SG" dirty="0" err="1"/>
-              <a:t>Analyze</a:t>
-            </a:r>
-            <a:r>
-              <a:rPr lang="en-SG" dirty="0"/>
-              <a:t> survey ratings for: Presales &amp; Partnership, Technical Expertise, Project Delivery, Post-Sales Support, NPS and to identify segments with consistently high or low satisfaction.</a:t>
+              <a:t>: Investigate hardware costs, software costs, manpower costs and low-scoring service dimensions highlighting opportunities for cost optimization and margin improvement.</a:t>
             </a:r>
           </a:p>
         </p:txBody>
@@ -3709,7 +3695,7 @@
             </a:r>
             <a:r>
               <a:rPr lang="en-SG" b="1" dirty="0"/>
-              <a:t>Satisfaction–profitability relationship</a:t>
+              <a:t>Satisfaction by client segment</a:t>
             </a:r>
             <a:r>
               <a:rPr lang="en-SG" dirty="0"/>
@@ -3721,7 +3707,7 @@
             </a:r>
             <a:r>
               <a:rPr lang="en-SG" dirty="0"/>
-              <a:t> Satisfaction vs Gross Profit, NPS vs Gross Margin, Satisfaction vs Revenue to check whether improving customer satisfaction translates into stronger business performance.</a:t>
+              <a:t> survey ratings for: Presales &amp; Partnership, Technical Expertise, Project Delivery, Post-Sales Support, NPS and to identify segments with consistently high or low satisfaction.</a:t>
             </a:r>
           </a:p>
           <a:p>
@@ -3734,11 +3720,11 @@
             </a:r>
             <a:r>
               <a:rPr lang="en-SG" b="1" dirty="0"/>
-              <a:t>Drivers of profitability</a:t>
+              <a:t>Drivers of satisfaction: </a:t>
             </a:r>
             <a:r>
               <a:rPr lang="en-SG" dirty="0"/>
-              <a:t>: Investigate hardware costs, software costs, manpower costs and low-scoring service dimensions highlighting opportunities for cost optimization and margin improvement.</a:t>
+              <a:t>Analyse Presales &amp; Partnership, Technical Expertise, Project Delivery, Post-Sales Support to identify where service improvements will have the greatest effect on satisfaction and loyalty.</a:t>
             </a:r>
           </a:p>
           <a:p>
@@ -3751,11 +3737,19 @@
             </a:r>
             <a:r>
               <a:rPr lang="en-SG" b="1" dirty="0"/>
-              <a:t>Drivers of satisfaction: </a:t>
+              <a:t>Satisfaction–profitability relationship</a:t>
             </a:r>
             <a:r>
               <a:rPr lang="en-SG" dirty="0"/>
-              <a:t>Analyse Presales &amp; Partnership, Technical Expertise, Project Delivery, Post-Sales Support to identify where service improvements will have the greatest effect on satisfaction and loyalty.</a:t>
+              <a:t>: </a:t>
+            </a:r>
+            <a:r>
+              <a:rPr lang="en-SG" dirty="0" err="1"/>
+              <a:t>Analyze</a:t>
+            </a:r>
+            <a:r>
+              <a:rPr lang="en-SG" dirty="0"/>
+              <a:t> Satisfaction vs Gross Profit, NPS vs Gross Margin, Satisfaction vs Revenue to check whether improving customer satisfaction translates into stronger business performance.</a:t>
             </a:r>
           </a:p>
           <a:p>
